--- a/images/Research_Interest.pptx
+++ b/images/Research_Interest.pptx
@@ -7630,7 +7630,13 @@
             </a:extLst>
           </p:cNvPr>
           <p:cNvGraphicFramePr/>
-          <p:nvPr/>
+          <p:nvPr>
+            <p:extLst>
+              <p:ext uri="{D42A27DB-BD31-4B8C-83A1-F6EECF244321}">
+                <p14:modId xmlns:p14="http://schemas.microsoft.com/office/powerpoint/2010/main" val="2597481192"/>
+              </p:ext>
+            </p:extLst>
+          </p:nvPr>
         </p:nvGraphicFramePr>
         <p:xfrm>
           <a:off x="2063050" y="1358051"/>
